--- a/docs/content/mapping/mapping_lecture.pptx
+++ b/docs/content/mapping/mapping_lecture.pptx
@@ -3366,7 +3366,7 @@
             </a:pPr>
             <a:r>
               <a:rPr/>
-              <a:t>2026-07-05</a:t>
+              <a:t>2026-08-27</a:t>
             </a:r>
           </a:p>
         </p:txBody>
@@ -6116,23 +6116,15 @@
             </a:pPr>
             <a:r>
               <a:rPr sz="2000"/>
-              <a:t>You can wrangle, summarize, model, and join. Today we put data </a:t>
+              <a:t>You can wrangle, summarize, model, and join — today those skills point at a map instead of a table. Our dataset: </a:t>
             </a:r>
             <a:r>
               <a:rPr sz="2000" b="1"/>
-              <a:t>on a map</a:t>
+              <a:t>~4,600 real Bigfoot sightings</a:t>
             </a:r>
             <a:r>
               <a:rPr sz="2000"/>
-              <a:t> — the single most fun payoff in the toolkit. Our dataset: </a:t>
-            </a:r>
-            <a:r>
-              <a:rPr sz="2000" b="1"/>
-              <a:t>4,000+ real Bigfoot sightings</a:t>
-            </a:r>
-            <a:r>
-              <a:rPr sz="2000"/>
-              <a:t> across the US, each with a latitude and longitude. 🦶</a:t>
+              <a:t> across the US, each with a latitude and longitude, ready to become points and then a choropleth. 🦶</a:t>
             </a:r>
           </a:p>
         </p:txBody>
@@ -6497,7 +6489,7 @@
             </a:pPr>
             <a:r>
               <a:rPr sz="2000" b="1"/>
-              <a:t>✅ Why show a blank map?</a:t>
+              <a:t>✅ Why show a blank choropleth?</a:t>
             </a:r>
           </a:p>
           <a:p>
@@ -6505,64 +6497,64 @@
               <a:buNone/>
             </a:pPr>
             <a:r>
+              <a:rPr sz="2000">
+                <a:latin typeface="Courier"/>
+              </a:rPr>
+              <a:t>left_join()</a:t>
+            </a:r>
+            <a:r>
               <a:rPr sz="2000"/>
-              <a:t>A join only matches keys that are </a:t>
-            </a:r>
-            <a:r>
-              <a:rPr sz="2000" b="1"/>
-              <a:t>exactly</a:t>
+              <a:t> doesn’t know that </a:t>
+            </a:r>
+            <a:r>
+              <a:rPr sz="2000">
+                <a:latin typeface="Courier"/>
+              </a:rPr>
+              <a:t>"Washington"</a:t>
             </a:r>
             <a:r>
               <a:rPr sz="2000"/>
-              <a:t> equal. </a:t>
+              <a:t> and </a:t>
             </a:r>
             <a:r>
               <a:rPr sz="2000">
                 <a:latin typeface="Courier"/>
               </a:rPr>
-              <a:t>"Washington"</a:t>
+              <a:t>"washington"</a:t>
             </a:r>
             <a:r>
               <a:rPr sz="2000"/>
-              <a:t>, </a:t>
+              <a:t> mean the same state — as far as R is concerned they’re two unrelated strings, so every row fails to match and </a:t>
             </a:r>
             <a:r>
               <a:rPr sz="2000">
                 <a:latin typeface="Courier"/>
               </a:rPr>
-              <a:t>"washington"</a:t>
+              <a:t>sightings</a:t>
             </a:r>
             <a:r>
               <a:rPr sz="2000"/>
-              <a:t>, and </a:t>
+              <a:t> comes back </a:t>
             </a:r>
             <a:r>
               <a:rPr sz="2000">
                 <a:latin typeface="Courier"/>
               </a:rPr>
-              <a:t>" Washington"</a:t>
+              <a:t>NA</a:t>
             </a:r>
             <a:r>
               <a:rPr sz="2000"/>
-              <a:t> are three different keys. A silent all-</a:t>
+              <a:t> everywhere. </a:t>
             </a:r>
             <a:r>
               <a:rPr sz="2000">
                 <a:latin typeface="Courier"/>
               </a:rPr>
-              <a:t>NA</a:t>
+              <a:t>scale_fill_viridis_c()</a:t>
             </a:r>
             <a:r>
               <a:rPr sz="2000"/>
-              <a:t> result is almost always a </a:t>
-            </a:r>
-            <a:r>
-              <a:rPr sz="2000" b="1"/>
-              <a:t>key-mismatch</a:t>
-            </a:r>
-            <a:r>
-              <a:rPr sz="2000"/>
-              <a:t> — check case and spelling first.</a:t>
+              <a:t> then has nothing to shade with, and you get a map that ran without a single error yet shows you nothing. Grey-everywhere is the signature of a key-mismatch, not a code bug.</a:t>
             </a:r>
           </a:p>
         </p:txBody>
@@ -10002,54 +9994,56 @@
           <a:p>
             <a:pPr lvl="0"/>
             <a:r>
-              <a:rPr sz="2000" b="1"/>
-              <a:t>Predicting the pattern</a:t>
-            </a:r>
-            <a:r>
               <a:rPr sz="2000"/>
-              <a:t> (“Pacific Northwest?”) makes the map mean something when it appears.</a:t>
+              <a:t>A choropleth is easy to accept at face value once it’s drawn — naming the state you expect to be darkest </a:t>
+            </a:r>
+            <a:r>
+              <a:rPr sz="2000" i="1"/>
+              <a:t>before</a:t>
+            </a:r>
+            <a:r>
+              <a:rPr sz="2000"/>
+              <a:t> rendering it is what makes you actually look at the result instead of just admiring it.</a:t>
             </a:r>
           </a:p>
           <a:p>
             <a:pPr lvl="0"/>
             <a:r>
-              <a:rPr sz="2000" b="1"/>
-              <a:t>Typing</a:t>
+              <a:rPr sz="2000">
+                <a:latin typeface="Courier"/>
+              </a:rPr>
+              <a:t>st_as_sf(coords = ..., crs = ...)</a:t>
             </a:r>
             <a:r>
               <a:rPr sz="2000"/>
-              <a:t> builds the </a:t>
+              <a:t> and </a:t>
             </a:r>
             <a:r>
               <a:rPr sz="2000">
                 <a:latin typeface="Courier"/>
               </a:rPr>
-              <a:t>sf</a:t>
+              <a:t>geom_sf()</a:t>
             </a:r>
             <a:r>
               <a:rPr sz="2000"/>
-              <a:t> + </a:t>
+              <a:t> are new syntax with a specific argument order; typing them yourself is what keeps </a:t>
             </a:r>
             <a:r>
               <a:rPr sz="2000">
                 <a:latin typeface="Courier"/>
               </a:rPr>
-              <a:t>geom_sf</a:t>
+              <a:t>coords = c("longitude", "latitude")</a:t>
             </a:r>
             <a:r>
               <a:rPr sz="2000"/>
-              <a:t> muscle memory.</a:t>
+              <a:t> from becoming a copy-paste habit you never really learned.</a:t>
             </a:r>
           </a:p>
           <a:p>
             <a:pPr lvl="0"/>
             <a:r>
-              <a:rPr sz="2000" b="1"/>
-              <a:t>Chunk → practice</a:t>
-            </a:r>
-            <a:r>
               <a:rPr sz="2000"/>
-              <a:t> keeps each new idea from piling up.</a:t>
+              <a:t>Spatial objects, basemaps, joins, and projections each get their own chunk so a CRS mismatch doesn’t get confused with a join-key mismatch later.</a:t>
             </a:r>
           </a:p>
         </p:txBody>
@@ -11405,7 +11399,7 @@
             </a:r>
             <a:r>
               <a:rPr sz="2000"/>
-              <a:t> We’re about to turn 4,000+ rows of lat/long into points and plot them with </a:t>
+              <a:t> We’re about to turn ~4,600 rows of lat/long into points and plot them with </a:t>
             </a:r>
             <a:r>
               <a:rPr sz="2000" b="1"/>

--- a/docs/content/mapping/mapping_lecture.pptx
+++ b/docs/content/mapping/mapping_lecture.pptx
@@ -3305,7 +3305,7 @@
             </a:pPr>
             <a:r>
               <a:rPr/>
-              <a:t>Lecture 13 — Mapping: Where Is Bigfoot?</a:t>
+              <a:t>Lecture — Mapping: Where Is Bigfoot?</a:t>
             </a:r>
           </a:p>
         </p:txBody>
@@ -9440,7 +9440,7 @@
             </a:pPr>
             <a:r>
               <a:rPr b="1"/>
-              <a:t>Homework:</a:t>
+              <a:t>Extension (out of class):</a:t>
             </a:r>
           </a:p>
           <a:p>
@@ -9473,7 +9473,7 @@
             </a:r>
             <a:r>
               <a:rPr/>
-              <a:t> package and map where it lives — see the assignment.</a:t>
+              <a:t> package and map where it lives — see the activity.</a:t>
             </a:r>
           </a:p>
         </p:txBody>

--- a/docs/content/mapping/mapping_lecture.pptx
+++ b/docs/content/mapping/mapping_lecture.pptx
@@ -3366,7 +3366,7 @@
             </a:pPr>
             <a:r>
               <a:rPr/>
-              <a:t>2026-08-27</a:t>
+              <a:t>2026-09-01</a:t>
             </a:r>
           </a:p>
         </p:txBody>

--- a/docs/content/mapping/mapping_lecture.pptx
+++ b/docs/content/mapping/mapping_lecture.pptx
@@ -3366,7 +3366,7 @@
             </a:pPr>
             <a:r>
               <a:rPr/>
-              <a:t>2026-09-01</a:t>
+              <a:t>2026-09-03</a:t>
             </a:r>
           </a:p>
         </p:txBody>

--- a/docs/content/mapping/mapping_lecture.pptx
+++ b/docs/content/mapping/mapping_lecture.pptx
@@ -3366,7 +3366,7 @@
             </a:pPr>
             <a:r>
               <a:rPr/>
-              <a:t>2026-09-03</a:t>
+              <a:t>2026-09-04</a:t>
             </a:r>
           </a:p>
         </p:txBody>
